--- a/public/fun/pack/pptx/weddingpro/결혼식프리미엄_25_감사·답례중심_선셋로즈.pptx
+++ b/public/fun/pack/pptx/weddingpro/결혼식프리미엄_25_감사·답례중심_선셋로즈.pptx
@@ -113,12 +113,12 @@
   <p:extLst>
     <p:ext uri="{521415D9-36F7-43E2-AB2F-B90AF26B5E84}">
       <p14:sectionLst xmlns:p14="http://schemas.microsoft.com/office/powerpoint/2010/main">
-        <p14:section name="시작" id="{4593CE94-C910-482E-8ACD-BC458AA65FCC}">
+        <p14:section name="시작" id="{36A93F2E-55DB-4A88-8AD4-C98227F44EAD}">
           <p14:sldIdLst>
             <p14:sldId id="256"/>
           </p14:sldIdLst>
         </p14:section>
-        <p14:section name="본문" id="{3D022BF2-BA3B-4DE4-A7BA-6EF2066383E8}">
+        <p14:section name="본문" id="{2DD3894B-3165-4226-B4A2-FDFFAA16BEEF}">
           <p14:sldIdLst>
             <p14:sldId id="257"/>
             <p14:sldId id="258"/>
@@ -127,7 +127,7 @@
             <p14:sldId id="261"/>
           </p14:sldIdLst>
         </p14:section>
-        <p14:section name="마무리" id="{D66002E7-D7FF-4E96-92C2-2FE71234C6FC}">
+        <p14:section name="마무리" id="{6CF90F09-1085-4511-8738-9272067D29AE}">
           <p14:sldIdLst>
             <p14:sldId id="262"/>
           </p14:sldIdLst>
@@ -1489,7 +1489,7 @@
             </a:lvl1pPr>
           </a:lstStyle>
           <a:p>
-            <a:fld id="{F4E1811F-1937-43B4-BFAB-C31AA3BF433D}" type="slidenum">
+            <a:fld id="{C0ADCA84-C2EF-4C53-AAD3-16717A61F316}" type="slidenum">
               <a:rPr lang="en-US"/>
               <a:t>‹#›</a:t>
             </a:fld>
@@ -2470,7 +2470,7 @@
             </a:lvl1pPr>
           </a:lstStyle>
           <a:p>
-            <a:fld id="{BC904106-F0A4-4C91-83E4-94347C317EB0}" type="slidenum">
+            <a:fld id="{0101CBD8-1A57-4EAC-9387-AC0B0FA77844}" type="slidenum">
               <a:rPr lang="en-US"/>
               <a:t>‹#›</a:t>
             </a:fld>
@@ -3472,7 +3472,7 @@
             </a:lvl1pPr>
           </a:lstStyle>
           <a:p>
-            <a:fld id="{CFE243D3-5D8A-4D9A-AFCE-81C28AE05BD0}" type="slidenum">
+            <a:fld id="{0527CE60-E539-4218-B82E-32105F1AAC17}" type="slidenum">
               <a:rPr lang="en-US"/>
               <a:t>‹#›</a:t>
             </a:fld>
@@ -4641,7 +4641,7 @@
           <a:p>
             <a:r>
               <a:rPr lang="ko-KR"/>
-              <a:t>0000. 00. 00 · 예식장 이름</a:t>
+              <a:t>날짜 입력 · 예식장 이름</a:t>
             </a:r>
           </a:p>
         </p:txBody>
@@ -4876,7 +4876,7 @@
           <a:bodyPr/>
           <a:lstStyle/>
           <a:p>
-            <a:fld id="{D8366A4A-7649-4988-9E13-5E420A19EB69}" type="slidenum">
+            <a:fld id="{94569D3D-AE3E-4303-8B75-13ECD99D4F61}" type="slidenum">
               <a:rPr lang="en-US"/>
               <a:t>‹#›</a:t>
             </a:fld>
@@ -5332,7 +5332,7 @@
           <a:bodyPr/>
           <a:lstStyle/>
           <a:p>
-            <a:fld id="{0CC4BDE0-72D6-42F0-9017-8981EACC55BE}" type="slidenum">
+            <a:fld id="{098C6F90-C20C-44F2-AFAE-A4F0BB60C822}" type="slidenum">
               <a:rPr lang="en-US"/>
               <a:t>‹#›</a:t>
             </a:fld>
@@ -5701,7 +5701,7 @@
           <a:bodyPr/>
           <a:lstStyle/>
           <a:p>
-            <a:fld id="{3AA36DEE-AAB8-4BF0-8594-EDEAB49E1F82}" type="slidenum">
+            <a:fld id="{E1E81787-7D9C-4B93-A6D3-42DFA2CC21B2}" type="slidenum">
               <a:rPr lang="en-US"/>
               <a:t>‹#›</a:t>
             </a:fld>
@@ -7031,7 +7031,7 @@
           <a:bodyPr/>
           <a:lstStyle/>
           <a:p>
-            <a:fld id="{ADF03B80-17D2-45E7-AAFA-877BA815A039}" type="slidenum">
+            <a:fld id="{7538235F-AA81-4735-878F-084D1BE04CB3}" type="slidenum">
               <a:rPr lang="en-US"/>
               <a:t>‹#›</a:t>
             </a:fld>
@@ -7119,7 +7119,7 @@
           <a:bodyPr/>
           <a:lstStyle/>
           <a:p>
-            <a:fld id="{3FAA8BD7-A7EC-4036-AAD8-72F15CE3A768}" type="slidenum">
+            <a:fld id="{FCA3ABB6-56A9-4386-BFAD-5D7E83F8A360}" type="slidenum">
               <a:rPr lang="en-US"/>
               <a:t>‹#›</a:t>
             </a:fld>
